--- a/artifacts/speaking-portfolio-expanded/talks/free-tier/free-tier-30min-handout.pptx
+++ b/artifacts/speaking-portfolio-expanded/talks/free-tier/free-tier-30min-handout.pptx
@@ -199,7 +199,7 @@
                 <a:ea typeface="Arial"/>
                 <a:cs typeface="Arial"/>
               </a:rPr>
-              <a:t xml:space="preserve">[Presenter scripts](../packets/free-tier/script-40min.md) · [Packet](../packets/free-tier/packet.md) · [Runbook section 4](../demos/DEMO-RUNBOOK.md#4-cry-me-a-free-tier) · [Kit](../demos/index.html) · [Evidence](../packets/free-tier/evidence-bank.md)</a:t>
+              <a:t xml:space="preserve">[Presenter scripts](script-40min.md) · [Packet](packet.md) · [Runbook section 4](../../demos/DEMO-RUNBOOK.md#4-cry-me-a-free-tier) · [Kit](../../../../public/talks/demos/index.html) · [Evidence](evidence-bank.md)</a:t>
             </a:r>
             <a:endParaRPr lang="en-US" sz="1200"/>
           </a:p>
